--- a/dist/초5/사회·역사/국토와생활/초5_사회·역사_국토와생활_01_우리나라의위치와영역.pptx
+++ b/dist/초5/사회·역사/국토와생활/초5_사회·역사_국토와생활_01_우리나라의위치와영역.pptx
@@ -121,13 +121,13 @@
   <p:extLst>
     <p:ext uri="{521415D9-36F7-43E2-AB2F-B90AF26B5E84}">
       <p14:sectionLst xmlns:p14="http://schemas.microsoft.com/office/powerpoint/2010/main">
-        <p14:section name="도입" id="{dd6eb36f-bd89-9525-8b5e-f4db36c9e771}">
+        <p14:section name="도입" id="{58317965-ed76-9fa3-aaba-afbf0944b54b}">
           <p14:sldIdLst>
             <p14:sldId id="256"/>
             <p14:sldId id="257"/>
           </p14:sldIdLst>
         </p14:section>
-        <p14:section name="개념" id="{a8600b0f-9600-2ac6-fad3-bb3065d2cdcb}">
+        <p14:section name="개념" id="{28b624b6-65d8-2076-a51d-8e9914e254a1}">
           <p14:sldIdLst>
             <p14:sldId id="258"/>
             <p14:sldId id="259"/>
@@ -135,7 +135,7 @@
             <p14:sldId id="262"/>
           </p14:sldIdLst>
         </p14:section>
-        <p14:section name="연습" id="{b2c49715-7548-a383-52de-a19c9e144f0f}">
+        <p14:section name="연습" id="{bc21154e-1532-2000-fb1a-0fe616466684}">
           <p14:sldIdLst>
             <p14:sldId id="260"/>
             <p14:sldId id="263"/>
@@ -143,25 +143,25 @@
             <p14:sldId id="265"/>
           </p14:sldIdLst>
         </p14:section>
-        <p14:section name="개념" id="{da71e4e5-492d-3bbb-5427-abb1d83789ed}">
+        <p14:section name="개념" id="{c3ead04b-610d-3ba8-935b-0f5495a70a37}">
           <p14:sldIdLst/>
         </p14:section>
-        <p14:section name="연습" id="{47c601bf-7eff-26a1-cceb-935e30126e61}">
+        <p14:section name="연습" id="{4b8dd362-5af2-a437-63a4-a2ec0f369234}">
           <p14:sldIdLst/>
         </p14:section>
-        <p14:section name="확인" id="{02ecdfce-d3fa-e612-1337-5a07ddf2e09f}">
+        <p14:section name="확인" id="{1786aa79-40da-6058-53b3-9d26ad39eb3a}">
           <p14:sldIdLst>
             <p14:sldId id="266"/>
             <p14:sldId id="267"/>
             <p14:sldId id="268"/>
           </p14:sldIdLst>
         </p14:section>
-        <p14:section name="정리" id="{9b051606-e820-cdce-dc0a-94d6885b0870}">
+        <p14:section name="정리" id="{fd13e197-f359-4c44-7155-d583908286c0}">
           <p14:sldIdLst>
             <p14:sldId id="269"/>
           </p14:sldIdLst>
         </p14:section>
-        <p14:section name="보충" id="{dcf91c9b-a38c-1a31-c19e-c5b76ba91bd6}">
+        <p14:section name="보충" id="{47ea43da-1ecd-0667-07e6-9f207f610723}">
           <p14:sldIdLst>
             <p14:sldId id="270"/>
           </p14:sldIdLst>
@@ -1186,7 +1186,7 @@
 막히면
 - 종이에 큰 십자를 그리고 위에 ‘북’만 써 준 뒤, 아이가 나머지 방위를 채우게 합니다.
 주의
-- 이 차시는 계획상 바로 앞의 선수 차시가 없습니다. 방위와 지도 읽기가 많이 흔들리면 4학년 ‘지도 읽기’(KR22-G04-SOC-MAP-L01)를 먼저 합니다.
+- 방위와 지도 읽기가 많이 흔들리면 앞 차시인 4학년 ‘지도 읽기’(KR22-G04-SOC-MAP-L01)를 먼저 합니다.
 - 보충이 오래 걸리면 오늘은 여기까지 하고 다음 날 S02부터 다시 시작합니다.</a:t>
             </a:r>
             <a:endParaRPr lang="en-US" dirty="0"/>
